--- a/lectures/Lecture_02/slides/Lecture_02_From_Linear_Models_to_Neural_Networks.pptx
+++ b/lectures/Lecture_02/slides/Lecture_02_From_Linear_Models_to_Neural_Networks.pptx
@@ -6729,8 +6729,8 @@
         </p:nvSpPr>
         <p:spPr>
           <a:xfrm>
-            <a:off x="658368" y="1883664"/>
-            <a:ext cx="146304" cy="146304"/>
+            <a:off x="658368" y="1837944"/>
+            <a:ext cx="128016" cy="128016"/>
           </a:xfrm>
           <a:prstGeom prst="rect">
             <a:avLst/>
@@ -6773,8 +6773,8 @@
         </p:nvSpPr>
         <p:spPr>
           <a:xfrm>
-            <a:off x="1042416" y="1700784"/>
-            <a:ext cx="10490911" cy="640080"/>
+            <a:off x="1024128" y="1691640"/>
+            <a:ext cx="10509199" cy="658368"/>
           </a:xfrm>
           <a:prstGeom prst="rect">
             <a:avLst/>
@@ -6815,8 +6815,8 @@
         </p:nvSpPr>
         <p:spPr>
           <a:xfrm>
-            <a:off x="658368" y="2596896"/>
-            <a:ext cx="146304" cy="146304"/>
+            <a:off x="658368" y="2551176"/>
+            <a:ext cx="128016" cy="128016"/>
           </a:xfrm>
           <a:prstGeom prst="rect">
             <a:avLst/>
@@ -6859,8 +6859,8 @@
         </p:nvSpPr>
         <p:spPr>
           <a:xfrm>
-            <a:off x="1042416" y="2414016"/>
-            <a:ext cx="10490911" cy="640080"/>
+            <a:off x="1024128" y="2404872"/>
+            <a:ext cx="10509199" cy="658368"/>
           </a:xfrm>
           <a:prstGeom prst="rect">
             <a:avLst/>
@@ -6901,8 +6901,8 @@
         </p:nvSpPr>
         <p:spPr>
           <a:xfrm>
-            <a:off x="658368" y="3310128"/>
-            <a:ext cx="146304" cy="146304"/>
+            <a:off x="658368" y="3264408"/>
+            <a:ext cx="128016" cy="128016"/>
           </a:xfrm>
           <a:prstGeom prst="rect">
             <a:avLst/>
@@ -6945,8 +6945,8 @@
         </p:nvSpPr>
         <p:spPr>
           <a:xfrm>
-            <a:off x="1042416" y="3127248"/>
-            <a:ext cx="10490911" cy="640080"/>
+            <a:off x="1024128" y="3118104"/>
+            <a:ext cx="10509199" cy="658368"/>
           </a:xfrm>
           <a:prstGeom prst="rect">
             <a:avLst/>
@@ -6987,8 +6987,8 @@
         </p:nvSpPr>
         <p:spPr>
           <a:xfrm>
-            <a:off x="658368" y="4023360"/>
-            <a:ext cx="146304" cy="146304"/>
+            <a:off x="658368" y="3977640"/>
+            <a:ext cx="128016" cy="128016"/>
           </a:xfrm>
           <a:prstGeom prst="rect">
             <a:avLst/>
@@ -7031,8 +7031,8 @@
         </p:nvSpPr>
         <p:spPr>
           <a:xfrm>
-            <a:off x="1042416" y="3840480"/>
-            <a:ext cx="10490911" cy="640080"/>
+            <a:off x="1024128" y="3831336"/>
+            <a:ext cx="10509199" cy="658368"/>
           </a:xfrm>
           <a:prstGeom prst="rect">
             <a:avLst/>
@@ -7073,8 +7073,8 @@
         </p:nvSpPr>
         <p:spPr>
           <a:xfrm>
-            <a:off x="658368" y="4736592"/>
-            <a:ext cx="146304" cy="146304"/>
+            <a:off x="658368" y="4690872"/>
+            <a:ext cx="128016" cy="128016"/>
           </a:xfrm>
           <a:prstGeom prst="rect">
             <a:avLst/>
@@ -7117,8 +7117,8 @@
         </p:nvSpPr>
         <p:spPr>
           <a:xfrm>
-            <a:off x="1042416" y="4553712"/>
-            <a:ext cx="10490911" cy="640080"/>
+            <a:off x="1024128" y="4544568"/>
+            <a:ext cx="10509199" cy="658368"/>
           </a:xfrm>
           <a:prstGeom prst="rect">
             <a:avLst/>
@@ -8089,8 +8089,8 @@
         </p:nvSpPr>
         <p:spPr>
           <a:xfrm>
-            <a:off x="658368" y="1764792"/>
-            <a:ext cx="502920" cy="457200"/>
+            <a:off x="658368" y="1728216"/>
+            <a:ext cx="502920" cy="530352"/>
           </a:xfrm>
           <a:prstGeom prst="rect">
             <a:avLst/>
@@ -8131,8 +8131,8 @@
         </p:nvSpPr>
         <p:spPr>
           <a:xfrm>
-            <a:off x="1344168" y="1783080"/>
-            <a:ext cx="10189159" cy="457200"/>
+            <a:off x="1344168" y="1728216"/>
+            <a:ext cx="10189159" cy="530352"/>
           </a:xfrm>
           <a:prstGeom prst="rect">
             <a:avLst/>
@@ -8173,7 +8173,7 @@
         </p:nvSpPr>
         <p:spPr>
           <a:xfrm>
-            <a:off x="658368" y="2267712"/>
+            <a:off x="658368" y="2276856"/>
             <a:ext cx="10874959" cy="9525"/>
           </a:xfrm>
           <a:prstGeom prst="rect">
@@ -8217,8 +8217,8 @@
         </p:nvSpPr>
         <p:spPr>
           <a:xfrm>
-            <a:off x="658368" y="2368296"/>
-            <a:ext cx="502920" cy="457200"/>
+            <a:off x="658368" y="2331720"/>
+            <a:ext cx="502920" cy="530352"/>
           </a:xfrm>
           <a:prstGeom prst="rect">
             <a:avLst/>
@@ -8259,8 +8259,8 @@
         </p:nvSpPr>
         <p:spPr>
           <a:xfrm>
-            <a:off x="1344168" y="2386584"/>
-            <a:ext cx="10189159" cy="457200"/>
+            <a:off x="1344168" y="2331720"/>
+            <a:ext cx="10189159" cy="530352"/>
           </a:xfrm>
           <a:prstGeom prst="rect">
             <a:avLst/>
@@ -8301,7 +8301,7 @@
         </p:nvSpPr>
         <p:spPr>
           <a:xfrm>
-            <a:off x="658368" y="2871216"/>
+            <a:off x="658368" y="2880360"/>
             <a:ext cx="10874959" cy="9525"/>
           </a:xfrm>
           <a:prstGeom prst="rect">
@@ -8345,8 +8345,8 @@
         </p:nvSpPr>
         <p:spPr>
           <a:xfrm>
-            <a:off x="658368" y="2971800"/>
-            <a:ext cx="502920" cy="457200"/>
+            <a:off x="658368" y="2935224"/>
+            <a:ext cx="502920" cy="530352"/>
           </a:xfrm>
           <a:prstGeom prst="rect">
             <a:avLst/>
@@ -8387,8 +8387,8 @@
         </p:nvSpPr>
         <p:spPr>
           <a:xfrm>
-            <a:off x="1344168" y="2990088"/>
-            <a:ext cx="10189159" cy="457200"/>
+            <a:off x="1344168" y="2935224"/>
+            <a:ext cx="10189159" cy="530352"/>
           </a:xfrm>
           <a:prstGeom prst="rect">
             <a:avLst/>
@@ -8429,7 +8429,7 @@
         </p:nvSpPr>
         <p:spPr>
           <a:xfrm>
-            <a:off x="658368" y="3474720"/>
+            <a:off x="658368" y="3483864"/>
             <a:ext cx="10874959" cy="9525"/>
           </a:xfrm>
           <a:prstGeom prst="rect">
@@ -8473,8 +8473,8 @@
         </p:nvSpPr>
         <p:spPr>
           <a:xfrm>
-            <a:off x="658368" y="3575304"/>
-            <a:ext cx="502920" cy="457200"/>
+            <a:off x="658368" y="3538728"/>
+            <a:ext cx="502920" cy="530352"/>
           </a:xfrm>
           <a:prstGeom prst="rect">
             <a:avLst/>
@@ -8515,8 +8515,8 @@
         </p:nvSpPr>
         <p:spPr>
           <a:xfrm>
-            <a:off x="1344168" y="3593592"/>
-            <a:ext cx="10189159" cy="457200"/>
+            <a:off x="1344168" y="3538728"/>
+            <a:ext cx="10189159" cy="530352"/>
           </a:xfrm>
           <a:prstGeom prst="rect">
             <a:avLst/>
@@ -8557,7 +8557,7 @@
         </p:nvSpPr>
         <p:spPr>
           <a:xfrm>
-            <a:off x="658368" y="4078224"/>
+            <a:off x="658368" y="4087368"/>
             <a:ext cx="10874959" cy="9525"/>
           </a:xfrm>
           <a:prstGeom prst="rect">
@@ -8601,8 +8601,8 @@
         </p:nvSpPr>
         <p:spPr>
           <a:xfrm>
-            <a:off x="658368" y="4178808"/>
-            <a:ext cx="502920" cy="457200"/>
+            <a:off x="658368" y="4142232"/>
+            <a:ext cx="502920" cy="530352"/>
           </a:xfrm>
           <a:prstGeom prst="rect">
             <a:avLst/>
@@ -8643,8 +8643,8 @@
         </p:nvSpPr>
         <p:spPr>
           <a:xfrm>
-            <a:off x="1344168" y="4197096"/>
-            <a:ext cx="10189159" cy="457200"/>
+            <a:off x="1344168" y="4142232"/>
+            <a:ext cx="10189159" cy="530352"/>
           </a:xfrm>
           <a:prstGeom prst="rect">
             <a:avLst/>
@@ -8685,7 +8685,7 @@
         </p:nvSpPr>
         <p:spPr>
           <a:xfrm>
-            <a:off x="658368" y="4681728"/>
+            <a:off x="658368" y="4690872"/>
             <a:ext cx="10874959" cy="9525"/>
           </a:xfrm>
           <a:prstGeom prst="rect">
@@ -8729,8 +8729,8 @@
         </p:nvSpPr>
         <p:spPr>
           <a:xfrm>
-            <a:off x="658368" y="4892040"/>
-            <a:ext cx="10874959" cy="457200"/>
+            <a:off x="658368" y="4818888"/>
+            <a:ext cx="10874959" cy="411480"/>
           </a:xfrm>
           <a:prstGeom prst="rect">
             <a:avLst/>
@@ -8752,7 +8752,7 @@
               </a:spcAft>
             </a:pPr>
             <a:r>
-              <a:rPr sz="1400" b="0" i="1">
+              <a:rPr sz="1300" b="0" i="1">
                 <a:solidFill>
                   <a:srgbClr val="5A6375"/>
                 </a:solidFill>
